--- a/docs/利用者新規・変更情報入力タブ_操作マニュアル.pptx
+++ b/docs/利用者新規・変更情報入力タブ_操作マニュアル.pptx
@@ -3715,7 +3715,7 @@
                 </a:solidFill>
                 <a:latin typeface="Meiryo UI"/>
               </a:rPr>
-              <a:t>A. 黄色い「入力中」のままかも。右上の「保存する」で確定。キャンセルで破棄。</a:t>
+              <a:t>A. 黄色い「入力中」のままかも。右上の「保存する」で確定。キャンセルで破棄。自動保存はないので、保存せず移動しようとした時に出る確認ダイアログで「保存して移動」を選べば安心です。</a:t>
             </a:r>
           </a:p>
         </p:txBody>
@@ -7046,7 +7046,7 @@
             <a:avLst/>
           </a:prstGeom>
           <a:solidFill>
-            <a:srgbClr val="E2F0EC"/>
+            <a:srgbClr val="FBEAE2"/>
           </a:solidFill>
           <a:ln>
             <a:noFill/>
@@ -7090,7 +7090,7 @@
             <a:avLst/>
           </a:prstGeom>
           <a:solidFill>
-            <a:srgbClr val="0E8A78"/>
+            <a:srgbClr val="E2714A"/>
           </a:solidFill>
           <a:ln>
             <a:noFill/>
@@ -7152,11 +7152,11 @@
             <a:r>
               <a:rPr sz="1300" b="1">
                 <a:solidFill>
-                  <a:srgbClr val="0E8A78"/>
+                  <a:srgbClr val="E2714A"/>
                 </a:solidFill>
                 <a:latin typeface="Meiryo UI"/>
               </a:rPr>
-              <a:t>💡 新しいカードは初め「介護保険レンタル」にチェック</a:t>
+              <a:t>⚠️ 新しいカードは初めどれもチェックされていません</a:t>
             </a:r>
           </a:p>
           <a:p>
@@ -7175,7 +7175,7 @@
                 </a:solidFill>
                 <a:latin typeface="Meiryo UI"/>
               </a:rPr>
-              <a:t>違う場合はチェックを外し、あてはまるものを選んでください（複数可）。</a:t>
+              <a:t>必ず、あてはまるものにチェックを入れてください（複数可）。チェックしないまま保存すると空欄でシートに出力されます。</a:t>
             </a:r>
           </a:p>
         </p:txBody>
